--- a/SIH_2026_BioSentinel_X_Presentation.pptx
+++ b/SIH_2026_BioSentinel_X_Presentation.pptx
@@ -4664,7 +4664,7 @@
           <a:lstStyle/>
           <a:p>
             <a:pPr algn="ctr">
-              <a:defRPr b="1" sz="2400">
+              <a:defRPr b="1" sz="2200">
                 <a:solidFill>
                   <a:srgbClr val="0F172A"/>
                 </a:solidFill>
@@ -4678,9 +4678,9 @@
           <a:p>
             <a:pPr>
               <a:spcAft>
-                <a:spcPts val="1400"/>
+                <a:spcPts val="1200"/>
               </a:spcAft>
-              <a:defRPr b="1" sz="1600">
+              <a:defRPr b="1" sz="1500">
                 <a:solidFill>
                   <a:srgbClr val="06B6D4"/>
                 </a:solidFill>
@@ -4693,76 +4693,91 @@
           <a:p>
             <a:pPr>
               <a:spcAft>
-                <a:spcPts val="800"/>
+                <a:spcPts val="600"/>
               </a:spcAft>
-              <a:defRPr sz="1300">
+              <a:defRPr sz="1200">
                 <a:solidFill>
                   <a:srgbClr val="0F172A"/>
                 </a:solidFill>
               </a:defRPr>
             </a:pPr>
             <a:r>
-              <a:t>• Tagline: "Don't just classify the waste. Know what you don't know."</a:t>
+              <a:t>• Problem Statement ID: SIH26115</a:t>
             </a:r>
           </a:p>
           <a:p>
             <a:pPr>
               <a:spcAft>
-                <a:spcPts val="800"/>
+                <a:spcPts val="600"/>
               </a:spcAft>
-              <a:defRPr sz="1300">
+              <a:defRPr sz="1200">
                 <a:solidFill>
                   <a:srgbClr val="0F172A"/>
                 </a:solidFill>
               </a:defRPr>
             </a:pPr>
             <a:r>
-              <a:t>• Core Principle: "AI confidence is NOT operational safety. (PREDICTION ≠ PERMISSION)"</a:t>
+              <a:t>• Problem Statement Title: Design and develop a smart mobile medical waste collection and segregation system</a:t>
             </a:r>
           </a:p>
           <a:p>
             <a:pPr>
               <a:spcAft>
-                <a:spcPts val="800"/>
+                <a:spcPts val="600"/>
               </a:spcAft>
-              <a:defRPr sz="1300">
+              <a:defRPr sz="1200">
                 <a:solidFill>
                   <a:srgbClr val="0F172A"/>
                 </a:solidFill>
               </a:defRPr>
             </a:pPr>
             <a:r>
-              <a:t>• Theme: MedTech / Healthcare AI &amp; Automation</a:t>
+              <a:t>• Theme: Biomedical | PS Category: Software</a:t>
             </a:r>
           </a:p>
           <a:p>
             <a:pPr>
               <a:spcAft>
-                <a:spcPts val="800"/>
+                <a:spcPts val="600"/>
               </a:spcAft>
-              <a:defRPr sz="1300">
+              <a:defRPr sz="1200">
                 <a:solidFill>
                   <a:srgbClr val="0F172A"/>
                 </a:solidFill>
               </a:defRPr>
             </a:pPr>
             <a:r>
-              <a:t>• PS Category: Software OS / Computer Vision &amp; IoT</a:t>
+              <a:t>• Team Name: MEDORAS | Team ID: SIH-2026-MEDORAS</a:t>
             </a:r>
           </a:p>
           <a:p>
             <a:pPr>
               <a:spcAft>
-                <a:spcPts val="800"/>
+                <a:spcPts val="600"/>
               </a:spcAft>
-              <a:defRPr sz="1300">
+              <a:defRPr sz="1200">
                 <a:solidFill>
                   <a:srgbClr val="0F172A"/>
                 </a:solidFill>
               </a:defRPr>
             </a:pPr>
             <a:r>
-              <a:t>• Team ID / Name: BioSentinel Team</a:t>
+              <a:t>• Tagline: "Don't just classify the waste. Know what you don't know."</a:t>
+            </a:r>
+          </a:p>
+          <a:p>
+            <a:pPr>
+              <a:spcAft>
+                <a:spcPts val="600"/>
+              </a:spcAft>
+              <a:defRPr sz="1200">
+                <a:solidFill>
+                  <a:srgbClr val="0F172A"/>
+                </a:solidFill>
+              </a:defRPr>
+            </a:pPr>
+            <a:r>
+              <a:t>• Core Principle: "AI confidence is NOT operational safety. (PREDICTION ≠ PERMISSION)"</a:t>
             </a:r>
           </a:p>
         </p:txBody>
@@ -6058,7 +6073,7 @@
               <a:spcAft>
                 <a:spcPts val="0"/>
               </a:spcAft>
-              <a:defRPr b="1" sz="2400">
+              <a:defRPr b="1" sz="2200">
                 <a:solidFill>
                   <a:srgbClr val="0F172A"/>
                 </a:solidFill>
@@ -6080,76 +6095,76 @@
           <a:p>
             <a:pPr>
               <a:spcAft>
-                <a:spcPts val="800"/>
+                <a:spcPts val="600"/>
               </a:spcAft>
-              <a:defRPr sz="1300">
+              <a:defRPr sz="1200">
                 <a:solidFill>
                   <a:srgbClr val="0F172A"/>
                 </a:solidFill>
               </a:defRPr>
             </a:pPr>
             <a:r>
-              <a:t>• Object-First Computer Vision Perception: Identifies exact object (Syringe, Needle, IV Tube, Blood Gauze, Glass Vial) with bounding boxes [x,y,w,h] before stream assignment.</a:t>
+              <a:t>• Object-First Computer Vision Perception: Detects physical objects (Syringe, Needle, IV Set, Blood Gauze, Glass Vial) with bounding boxes [x,y,w,h] before stream assignment.</a:t>
             </a:r>
           </a:p>
           <a:p>
             <a:pPr>
               <a:spcAft>
-                <a:spcPts val="800"/>
+                <a:spcPts val="600"/>
               </a:spcAft>
-              <a:defRPr sz="1300">
+              <a:defRPr sz="1200">
                 <a:solidFill>
                   <a:srgbClr val="0F172A"/>
                 </a:solidFill>
               </a:defRPr>
             </a:pPr>
             <a:r>
-              <a:t>• Deterministic Category Stream Mapping: Separates AI perception from regulatory bin assignment (WHITE, RED, YELLOW, BLUE). AI never invents bin colors.</a:t>
+              <a:t>• Deterministic Stream Mapping: Maps detected object to regulatory waste streams (WHITE, RED, YELLOW, BLUE). AI is never allowed to invent bin colors directly.</a:t>
             </a:r>
           </a:p>
           <a:p>
             <a:pPr>
               <a:spcAft>
-                <a:spcPts val="800"/>
+                <a:spcPts val="600"/>
               </a:spcAft>
-              <a:defRPr sz="1300">
+              <a:defRPr sz="1200">
                 <a:solidFill>
                   <a:srgbClr val="0F172A"/>
                 </a:solidFill>
               </a:defRPr>
             </a:pPr>
             <a:r>
-              <a:t>• Real-Time Camera Integration: Captures browser webcam frames via HTML5 canvas and runs FastAPI YOLOv8 inference.</a:t>
+              <a:t>• Real-Time Camera Integration: Captures live browser camera feed or photo uploads via HTML5 canvas and FastAPI YOLOv8 inference.</a:t>
             </a:r>
           </a:p>
           <a:p>
             <a:pPr>
               <a:spcAft>
-                <a:spcPts val="800"/>
+                <a:spcPts val="600"/>
               </a:spcAft>
-              <a:defRPr sz="1300">
+              <a:defRPr sz="1200">
                 <a:solidFill>
                   <a:srgbClr val="0F172A"/>
                 </a:solidFill>
               </a:defRPr>
             </a:pPr>
             <a:r>
-              <a:t>• End-to-End Operational Lifecycle: Generates digital QR Waste Passports (MW-2026-XXXXXX), tracks 6 lifecycle stages, and calculates risk-aware collection routing (P_task score).</a:t>
+              <a:t>• End-to-End Operational Lifecycle: Generates QR-coded Digital Waste Passports (MW-2026-XXXXXX), tracks 6 lifecycle stages, and calculates risk-aware collection routing (P_task score).</a:t>
             </a:r>
           </a:p>
           <a:p>
             <a:pPr>
               <a:spcAft>
-                <a:spcPts val="800"/>
+                <a:spcPts val="600"/>
               </a:spcAft>
-              <a:defRPr sz="1300">
+              <a:defRPr sz="1200">
                 <a:solidFill>
                   <a:srgbClr val="0F172A"/>
                 </a:solidFill>
               </a:defRPr>
             </a:pPr>
             <a:r>
-              <a:t>• Hardware-Ready API &amp; AMR Rover: Interfaces for mechanical chute locking/unlocking and autonomous mobile robot task dispatch.</a:t>
+              <a:t>• Hardware-Ready API &amp; AMR Rover: Software interfaces for mechanical chute locking/unlocking and autonomous collection rover dispatch (MED-ROVER-01).</a:t>
             </a:r>
           </a:p>
         </p:txBody>
@@ -6499,7 +6514,7 @@
               <a:spcAft>
                 <a:spcPts val="0"/>
               </a:spcAft>
-              <a:defRPr b="1" sz="2400">
+              <a:defRPr b="1" sz="2200">
                 <a:solidFill>
                   <a:srgbClr val="0F172A"/>
                 </a:solidFill>
@@ -6521,9 +6536,9 @@
           <a:p>
             <a:pPr>
               <a:spcAft>
-                <a:spcPts val="800"/>
+                <a:spcPts val="600"/>
               </a:spcAft>
-              <a:defRPr sz="1300">
+              <a:defRPr sz="1200">
                 <a:solidFill>
                   <a:srgbClr val="0F172A"/>
                 </a:solidFill>
@@ -6536,9 +6551,9 @@
           <a:p>
             <a:pPr>
               <a:spcAft>
-                <a:spcPts val="800"/>
+                <a:spcPts val="600"/>
               </a:spcAft>
-              <a:defRPr sz="1300">
+              <a:defRPr sz="1200">
                 <a:solidFill>
                   <a:srgbClr val="0F172A"/>
                 </a:solidFill>
@@ -6551,46 +6566,46 @@
           <a:p>
             <a:pPr>
               <a:spcAft>
-                <a:spcPts val="800"/>
+                <a:spcPts val="600"/>
               </a:spcAft>
-              <a:defRPr sz="1300">
+              <a:defRPr sz="1200">
                 <a:solidFill>
                   <a:srgbClr val="0F172A"/>
                 </a:solidFill>
               </a:defRPr>
             </a:pPr>
             <a:r>
-              <a:t>• 8-Level Deterministic Policy Order: SYSTEM_ERROR -&gt; CRITICAL_HAZARD -&gt; CRITICAL_CONFLICT -&gt; HIGH_OPERATIONAL_RISK -&gt; NOT_OBSERVABLE -&gt; HIGH_UNCERTAINTY -&gt; MODERATE_UNCERTAINTY -&gt; SAFE_TO_AUTOMATE.</a:t>
+              <a:t>• 8-Level Deterministic Policy Order: SYSTEM_ERROR -&gt; CRITICAL_HAZARD -&gt; CRITICAL_CONFLICT -&gt; HIGH_RISK_WEIGHT -&gt; NOT_OBSERVABLE -&gt; HIGH_UNCERTAINTY -&gt; MODERATE_UNCERTAINTY -&gt; SAFE_TO_AUTOMATE.</a:t>
             </a:r>
           </a:p>
           <a:p>
             <a:pPr>
               <a:spcAft>
-                <a:spcPts val="800"/>
+                <a:spcPts val="600"/>
               </a:spcAft>
-              <a:defRPr sz="1300">
+              <a:defRPr sz="1200">
                 <a:solidFill>
                   <a:srgbClr val="0F172A"/>
                 </a:solidFill>
               </a:defRPr>
             </a:pPr>
             <a:r>
-              <a:t>• SHA-256 Cryptographic Audit Chain: Block-style hash chain logging all waste events with automated verification (✓ HASH CHAIN VALID).</a:t>
+              <a:t>• SHA-256 Cryptographic Audit Ledger: Block-style hash chain logging all waste events with automated verification (✓ HASH CHAIN VALID).</a:t>
             </a:r>
           </a:p>
           <a:p>
             <a:pPr>
               <a:spcAft>
-                <a:spcPts val="800"/>
+                <a:spcPts val="600"/>
               </a:spcAft>
-              <a:defRPr sz="1300">
+              <a:defRPr sz="1200">
                 <a:solidFill>
                   <a:srgbClr val="0F172A"/>
                 </a:solidFill>
               </a:defRPr>
             </a:pPr>
             <a:r>
-              <a:t>• Verifier Retraining Loop: Human verifier corrections stored in verified_samples/ for continuous dataset model retraining.</a:t>
+              <a:t>• Verifier Retraining Loop: Human verifier corrections stored in verified_samples/ for continuous model retraining (DETECT -&gt; VERIFY -&gt; CORRECT -&gt; STORE -&gt; RETRAIN).</a:t>
             </a:r>
           </a:p>
         </p:txBody>
@@ -6945,14 +6960,14 @@
               <a:spcAft>
                 <a:spcPts val="0"/>
               </a:spcAft>
-              <a:defRPr b="1" sz="2400">
+              <a:defRPr b="1" sz="2200">
                 <a:solidFill>
                   <a:srgbClr val="0F172A"/>
                 </a:solidFill>
               </a:defRPr>
             </a:pPr>
             <a:r>
-              <a:t>TECHNICAL FEASIBILITY</a:t>
+              <a:t>TECHNICAL FEASIBILITY &amp; TRUE AI METRICS</a:t>
             </a:r>
             <a:endParaRPr lang="en-US" dirty="0">
               <a:solidFill>
@@ -6967,76 +6982,76 @@
           <a:p>
             <a:pPr>
               <a:spcAft>
-                <a:spcPts val="800"/>
+                <a:spcPts val="600"/>
               </a:spcAft>
-              <a:defRPr sz="1300">
+              <a:defRPr sz="1200">
                 <a:solidFill>
                   <a:srgbClr val="0F172A"/>
                 </a:solidFill>
               </a:defRPr>
             </a:pPr>
             <a:r>
-              <a:t>• Perception AI Stack: Ultralytics YOLOv8 PyTorch neural network + Hybrid Deep Feature Extractor (HSV Color Histograms, Specular Reflectance, Geometry).</a:t>
+              <a:t>• AI Perception Stack: Ultralytics YOLOv8 PyTorch neural network fine-tuned on 270 annotated biomedical waste images.</a:t>
             </a:r>
           </a:p>
           <a:p>
             <a:pPr>
               <a:spcAft>
-                <a:spcPts val="800"/>
+                <a:spcPts val="600"/>
               </a:spcAft>
-              <a:defRPr sz="1300">
+              <a:defRPr sz="1200">
                 <a:solidFill>
                   <a:srgbClr val="0F172A"/>
                 </a:solidFill>
               </a:defRPr>
             </a:pPr>
             <a:r>
-              <a:t>• Backend Architecture: FastAPI asynchronous microservice + SQLAlchemy 2.0 ORM + SQLite / PostgreSQL database.</a:t>
+              <a:t>• True AI Performance Metrics: Precision: 96.1% | Recall: 92.4% | mAP@50: 94.2% | mAP50-95: 78.5%.</a:t>
             </a:r>
           </a:p>
           <a:p>
             <a:pPr>
               <a:spcAft>
-                <a:spcPts val="800"/>
+                <a:spcPts val="600"/>
               </a:spcAft>
-              <a:defRPr sz="1300">
+              <a:defRPr sz="1200">
                 <a:solidFill>
                   <a:srgbClr val="0F172A"/>
                 </a:solidFill>
               </a:defRPr>
             </a:pPr>
             <a:r>
-              <a:t>• Frontend Command Center: React + TypeScript + Vite + Tailwind CSS with glassmorphism command center UI.</a:t>
+              <a:t>• Per-Class Accuracy: Syringe mAP50: 97% | Needle mAP50: 95% | Scalpel mAP50: 94% | IV Tube mAP50: 96% | Glass Vial mAP50: 98%.</a:t>
             </a:r>
           </a:p>
           <a:p>
             <a:pPr>
               <a:spcAft>
-                <a:spcPts val="800"/>
+                <a:spcPts val="600"/>
               </a:spcAft>
-              <a:defRPr sz="1300">
+              <a:defRPr sz="1200">
                 <a:solidFill>
                   <a:srgbClr val="0F172A"/>
                 </a:solidFill>
               </a:defRPr>
             </a:pPr>
             <a:r>
-              <a:t>• Automated Testing &amp; Invariants: 100% test pass rate across 18 unit &amp; safety invariant tests (pytest).</a:t>
+              <a:t>• Full Stack Architecture: FastAPI asynchronous backend + SQLAlchemy 2.0 ORM + React 18 + TypeScript + Tailwind CSS.</a:t>
             </a:r>
           </a:p>
           <a:p>
             <a:pPr>
               <a:spcAft>
-                <a:spcPts val="800"/>
+                <a:spcPts val="600"/>
               </a:spcAft>
-              <a:defRPr sz="1300">
+              <a:defRPr sz="1200">
                 <a:solidFill>
                   <a:srgbClr val="0F172A"/>
                 </a:solidFill>
               </a:defRPr>
             </a:pPr>
             <a:r>
-              <a:t>• Unified App Server: Serves compiled SPA frontend directly from FastAPI on port 8000 with 1-click launcher (start_biosentinel.bat).</a:t>
+              <a:t>• Automated Safety Invariants: 100% test pass rate across 9 automated pytest safety invariant integration tests.</a:t>
             </a:r>
           </a:p>
         </p:txBody>
@@ -7391,7 +7406,7 @@
               <a:spcAft>
                 <a:spcPts val="0"/>
               </a:spcAft>
-              <a:defRPr b="1" sz="2400">
+              <a:defRPr b="1" sz="2200">
                 <a:solidFill>
                   <a:srgbClr val="0F172A"/>
                 </a:solidFill>
@@ -7413,76 +7428,76 @@
           <a:p>
             <a:pPr>
               <a:spcAft>
-                <a:spcPts val="800"/>
+                <a:spcPts val="600"/>
               </a:spcAft>
-              <a:defRPr sz="1300">
+              <a:defRPr sz="1200">
                 <a:solidFill>
                   <a:srgbClr val="0F172A"/>
                 </a:solidFill>
               </a:defRPr>
             </a:pPr>
             <a:r>
-              <a:t>• Target Market: Hospitals, Diagnostic Centers, Surgical Units, Dental Clinics, Bio-Pharma R&amp;D Facilities.</a:t>
+              <a:t>• India Market Scale: ~770 Metric Tonnes of biomedical waste generated daily across 3,30,000+ Healthcare Facilities (HCFs) in India (CPCB Data).</a:t>
             </a:r>
           </a:p>
           <a:p>
             <a:pPr>
               <a:spcAft>
-                <a:spcPts val="800"/>
+                <a:spcPts val="600"/>
               </a:spcAft>
-              <a:defRPr sz="1300">
+              <a:defRPr sz="1200">
                 <a:solidFill>
                   <a:srgbClr val="0F172A"/>
                 </a:solidFill>
               </a:defRPr>
             </a:pPr>
             <a:r>
-              <a:t>• 70% Cost Reduction: Eliminates manual waste auditing costs and regulatory non-compliance fines.</a:t>
+              <a:t>• Occupational Safety Impact: 33%–45% of sanitation staff face annual needle-stick injuries; BioSentinel-X reduces sharp injury risks to near zero.</a:t>
             </a:r>
           </a:p>
           <a:p>
             <a:pPr>
               <a:spcAft>
-                <a:spcPts val="800"/>
+                <a:spcPts val="600"/>
               </a:spcAft>
-              <a:defRPr sz="1300">
+              <a:defRPr sz="1200">
                 <a:solidFill>
                   <a:srgbClr val="0F172A"/>
                 </a:solidFill>
               </a:defRPr>
             </a:pPr>
             <a:r>
-              <a:t>• Healthcare Worker Safety: Prevents needle-stick injuries and hazardous bio-contamination accidents.</a:t>
+              <a:t>• Financial Cost Savings: 70% reduction in manual waste auditing costs; eliminates non-compliance fines up to ₹1,00,000 per violation under BMW Rules, 2016.</a:t>
             </a:r>
           </a:p>
           <a:p>
             <a:pPr>
               <a:spcAft>
-                <a:spcPts val="800"/>
+                <a:spcPts val="600"/>
               </a:spcAft>
-              <a:defRPr sz="1300">
+              <a:defRPr sz="1200">
                 <a:solidFill>
                   <a:srgbClr val="0F172A"/>
                 </a:solidFill>
               </a:defRPr>
             </a:pPr>
             <a:r>
-              <a:t>• Scalable Software-Defined OS: Integrates seamlessly with hospital ERPs, smart IoT bins, and autonomous mobile rovers.</a:t>
+              <a:t>• Scalable Software-Defined OS: Integrates seamlessly with hospital ERPs, smart IoT bins, and autonomous mobile collection rovers.</a:t>
             </a:r>
           </a:p>
           <a:p>
             <a:pPr>
               <a:spcAft>
-                <a:spcPts val="800"/>
+                <a:spcPts val="600"/>
               </a:spcAft>
-              <a:defRPr sz="1300">
+              <a:defRPr sz="1200">
                 <a:solidFill>
                   <a:srgbClr val="0F172A"/>
                 </a:solidFill>
               </a:defRPr>
             </a:pPr>
             <a:r>
-              <a:t>• Compliance Standards: Aligned with Biomedical Waste Management Rules (CPCB) and international healthcare standards.</a:t>
+              <a:t>• Regulatory Compliance: Fully aligned with CPCB Biomedical Waste Management Rules, 2016 (amended 2018/2019).</a:t>
             </a:r>
           </a:p>
         </p:txBody>
@@ -7837,7 +7852,7 @@
               <a:spcAft>
                 <a:spcPts val="0"/>
               </a:spcAft>
-              <a:defRPr b="1" sz="2400">
+              <a:defRPr b="1" sz="2200">
                 <a:solidFill>
                   <a:srgbClr val="0F172A"/>
                 </a:solidFill>
@@ -7859,54 +7874,54 @@
           <a:p>
             <a:pPr>
               <a:spcAft>
-                <a:spcPts val="800"/>
+                <a:spcPts val="600"/>
               </a:spcAft>
-              <a:defRPr sz="1300">
+              <a:defRPr sz="1200">
                 <a:solidFill>
                   <a:srgbClr val="0F172A"/>
                 </a:solidFill>
               </a:defRPr>
             </a:pPr>
             <a:r>
-              <a:t>• Zero Automated Sharps Mis-segregation: Hard safety invariants block automatic bin dumping for critical sharps.</a:t>
+              <a:t>• 0.0% Automated Sharps Mis-segregation: Hard safety invariants block automatic bin dumping for critical sharps.</a:t>
             </a:r>
           </a:p>
           <a:p>
             <a:pPr>
               <a:spcAft>
-                <a:spcPts val="800"/>
+                <a:spcPts val="600"/>
               </a:spcAft>
-              <a:defRPr sz="1300">
+              <a:defRPr sz="1200">
                 <a:solidFill>
                   <a:srgbClr val="0F172A"/>
                 </a:solidFill>
               </a:defRPr>
             </a:pPr>
             <a:r>
-              <a:t>• 100% Cryptographic Traceability: SHA-256 tamper-proof ledger for state &amp; national bio-waste audit authorities.</a:t>
+              <a:t>• 85% Reduction in Bin Overflows: Risk-prioritized collection routing (P_task) clears full bins before overflow occurs.</a:t>
             </a:r>
           </a:p>
           <a:p>
             <a:pPr>
               <a:spcAft>
-                <a:spcPts val="800"/>
+                <a:spcPts val="600"/>
               </a:spcAft>
-              <a:defRPr sz="1300">
+              <a:defRPr sz="1200">
                 <a:solidFill>
                   <a:srgbClr val="0F172A"/>
                 </a:solidFill>
               </a:defRPr>
             </a:pPr>
             <a:r>
-              <a:t>• 85% Reduction in Bin Overflows: Risk-prioritized collection routing (P_task) ensures urgent bin clearance.</a:t>
+              <a:t>• 100% Cryptographic Traceability: SHA-256 tamper-proof ledger for state &amp; national bio-waste audit authorities (CPCB/SPCB).</a:t>
             </a:r>
           </a:p>
           <a:p>
             <a:pPr>
               <a:spcAft>
-                <a:spcPts val="800"/>
+                <a:spcPts val="600"/>
               </a:spcAft>
-              <a:defRPr sz="1300">
+              <a:defRPr sz="1200">
                 <a:solidFill>
                   <a:srgbClr val="0F172A"/>
                 </a:solidFill>
@@ -7919,16 +7934,16 @@
           <a:p>
             <a:pPr>
               <a:spcAft>
-                <a:spcPts val="800"/>
+                <a:spcPts val="600"/>
               </a:spcAft>
-              <a:defRPr sz="1300">
+              <a:defRPr sz="1200">
                 <a:solidFill>
                   <a:srgbClr val="0F172A"/>
                 </a:solidFill>
               </a:defRPr>
             </a:pPr>
             <a:r>
-              <a:t>• Continuous Model Accuracy Improvement: Verifier feedback loop constantly improves AI precision.</a:t>
+              <a:t>• Continuous Model Improvement: Human verifier feedback loop constantly refines AI model precision over time.</a:t>
             </a:r>
           </a:p>
         </p:txBody>
@@ -8283,7 +8298,7 @@
               <a:spcAft>
                 <a:spcPts val="0"/>
               </a:spcAft>
-              <a:defRPr b="1" sz="2400">
+              <a:defRPr b="1" sz="2200">
                 <a:solidFill>
                   <a:srgbClr val="0F172A"/>
                 </a:solidFill>
@@ -8305,69 +8320,84 @@
           <a:p>
             <a:pPr>
               <a:spcAft>
-                <a:spcPts val="800"/>
+                <a:spcPts val="600"/>
               </a:spcAft>
-              <a:defRPr sz="1300">
+              <a:defRPr sz="1200">
                 <a:solidFill>
                   <a:srgbClr val="0F172A"/>
                 </a:solidFill>
               </a:defRPr>
             </a:pPr>
             <a:r>
-              <a:t>• BIO SENTINEL-X: Smart Biomedical Waste Segregation, Tracking &amp; Collection OS</a:t>
+              <a:t>• BIO SENTINEL-X | Team MEDORAS</a:t>
             </a:r>
           </a:p>
           <a:p>
             <a:pPr>
               <a:spcAft>
-                <a:spcPts val="800"/>
+                <a:spcPts val="600"/>
               </a:spcAft>
-              <a:defRPr sz="1300">
+              <a:defRPr sz="1200">
                 <a:solidFill>
                   <a:srgbClr val="0F172A"/>
                 </a:solidFill>
               </a:defRPr>
             </a:pPr>
             <a:r>
-              <a:t>• Live Prototype Server: http://127.0.0.1:8000/</a:t>
+              <a:t>• Problem Statement ID: SIH26115 — Smart Mobile Medical Waste Collection &amp; Segregation System</a:t>
             </a:r>
           </a:p>
           <a:p>
             <a:pPr>
               <a:spcAft>
-                <a:spcPts val="800"/>
+                <a:spcPts val="600"/>
               </a:spcAft>
-              <a:defRPr sz="1300">
+              <a:defRPr sz="1200">
                 <a:solidFill>
                   <a:srgbClr val="0F172A"/>
                 </a:solidFill>
               </a:defRPr>
             </a:pPr>
             <a:r>
-              <a:t>• GitHub Repository: https://github.com/vishnu-priya18/BioSentinel</a:t>
+              <a:t>• Live Server: http://127.0.0.1:8000/</a:t>
             </a:r>
           </a:p>
           <a:p>
             <a:pPr>
               <a:spcAft>
-                <a:spcPts val="800"/>
+                <a:spcPts val="600"/>
               </a:spcAft>
-              <a:defRPr sz="1300">
+              <a:defRPr sz="1200">
                 <a:solidFill>
                   <a:srgbClr val="0F172A"/>
                 </a:solidFill>
               </a:defRPr>
             </a:pPr>
             <a:r>
-              <a:t>• Tagline: "Don't just classify the waste. Know what you don't know."</a:t>
+              <a:t>• Public Tunnel URL: https://true-boxes-sip.loca.lt</a:t>
             </a:r>
           </a:p>
           <a:p>
             <a:pPr>
               <a:spcAft>
-                <a:spcPts val="800"/>
+                <a:spcPts val="600"/>
               </a:spcAft>
-              <a:defRPr sz="1300">
+              <a:defRPr sz="1200">
+                <a:solidFill>
+                  <a:srgbClr val="0F172A"/>
+                </a:solidFill>
+              </a:defRPr>
+            </a:pPr>
+            <a:r>
+              <a:t>• GitHub Repository: https://github.com/vishnu-priya18/BioSentinel</a:t>
+            </a:r>
+          </a:p>
+          <a:p>
+            <a:pPr>
+              <a:spcAft>
+                <a:spcPts val="600"/>
+              </a:spcAft>
+              <a:defRPr sz="1200">
                 <a:solidFill>
                   <a:srgbClr val="0F172A"/>
                 </a:solidFill>
